--- a/presentation/final_presentation.pptx
+++ b/presentation/final_presentation.pptx
@@ -13267,7 +13267,177 @@
         </p:nvSpPr>
         <p:spPr>
           <a:xfrm>
-            <a:off x="3575303" y="2249424"/>
+            <a:off x="3538727" y="2212848"/>
+            <a:ext cx="329184" cy="329184"/>
+          </a:xfrm>
+          <a:prstGeom prst="ellipse">
+            <a:avLst/>
+          </a:prstGeom>
+          <a:solidFill>
+            <a:srgbClr val="DC2626"/>
+          </a:solidFill>
+          <a:ln>
+            <a:noFill/>
+          </a:ln>
+          <a:effectLst/>
+        </p:spPr>
+        <p:style>
+          <a:lnRef idx="1">
+            <a:schemeClr val="accent1"/>
+          </a:lnRef>
+          <a:fillRef idx="3">
+            <a:schemeClr val="accent1"/>
+          </a:fillRef>
+          <a:effectRef idx="2">
+            <a:schemeClr val="accent1"/>
+          </a:effectRef>
+          <a:fontRef idx="minor">
+            <a:schemeClr val="lt1"/>
+          </a:fontRef>
+        </p:style>
+        <p:txBody>
+          <a:bodyPr rtlCol="0" anchor="ctr"/>
+          <a:lstStyle/>
+          <a:p>
+            <a:pPr algn="ctr"/>
+          </a:p>
+        </p:txBody>
+      </p:sp>
+      <p:sp>
+        <p:nvSpPr>
+          <p:cNvPr id="10" name="TextBox 9"/>
+          <p:cNvSpPr txBox="1"/>
+          <p:nvPr/>
+        </p:nvSpPr>
+        <p:spPr>
+          <a:xfrm>
+            <a:off x="2560320" y="1691640"/>
+            <a:ext cx="2286000" cy="365760"/>
+          </a:xfrm>
+          <a:prstGeom prst="rect">
+            <a:avLst/>
+          </a:prstGeom>
+          <a:noFill/>
+        </p:spPr>
+        <p:txBody>
+          <a:bodyPr wrap="square" anchor="t">
+            <a:spAutoFit/>
+          </a:bodyPr>
+          <a:lstStyle/>
+          <a:p>
+            <a:pPr algn="ctr">
+              <a:lnSpc>
+                <a:spcPct val="115000"/>
+              </a:lnSpc>
+              <a:spcAft>
+                <a:spcPts val="400"/>
+              </a:spcAft>
+            </a:pPr>
+            <a:r>
+              <a:rPr sz="1350" b="1" i="0">
+                <a:solidFill>
+                  <a:srgbClr val="DC2626"/>
+                </a:solidFill>
+                <a:latin typeface="Segoe UI"/>
+              </a:rPr>
+              <a:t>Week 2 — discovery</a:t>
+            </a:r>
+          </a:p>
+        </p:txBody>
+      </p:sp>
+      <p:sp>
+        <p:nvSpPr>
+          <p:cNvPr id="11" name="TextBox 10"/>
+          <p:cNvSpPr txBox="1"/>
+          <p:nvPr/>
+        </p:nvSpPr>
+        <p:spPr>
+          <a:xfrm>
+            <a:off x="2514600" y="2651760"/>
+            <a:ext cx="2377440" cy="274320"/>
+          </a:xfrm>
+          <a:prstGeom prst="rect">
+            <a:avLst/>
+          </a:prstGeom>
+          <a:noFill/>
+        </p:spPr>
+        <p:txBody>
+          <a:bodyPr wrap="square" anchor="t">
+            <a:spAutoFit/>
+          </a:bodyPr>
+          <a:lstStyle/>
+          <a:p>
+            <a:pPr algn="ctr">
+              <a:lnSpc>
+                <a:spcPct val="115000"/>
+              </a:lnSpc>
+              <a:spcAft>
+                <a:spcPts val="400"/>
+              </a:spcAft>
+            </a:pPr>
+            <a:r>
+              <a:rPr sz="1150" b="0" i="0">
+                <a:solidFill>
+                  <a:srgbClr val="5B6470"/>
+                </a:solidFill>
+                <a:latin typeface="Segoe UI"/>
+              </a:rPr>
+              <a:t>Risk index built — then we find</a:t>
+            </a:r>
+          </a:p>
+        </p:txBody>
+      </p:sp>
+      <p:sp>
+        <p:nvSpPr>
+          <p:cNvPr id="12" name="TextBox 11"/>
+          <p:cNvSpPr txBox="1"/>
+          <p:nvPr/>
+        </p:nvSpPr>
+        <p:spPr>
+          <a:xfrm>
+            <a:off x="2514600" y="2898648"/>
+            <a:ext cx="2377440" cy="274320"/>
+          </a:xfrm>
+          <a:prstGeom prst="rect">
+            <a:avLst/>
+          </a:prstGeom>
+          <a:noFill/>
+        </p:spPr>
+        <p:txBody>
+          <a:bodyPr wrap="square" anchor="t">
+            <a:spAutoFit/>
+          </a:bodyPr>
+          <a:lstStyle/>
+          <a:p>
+            <a:pPr algn="ctr">
+              <a:lnSpc>
+                <a:spcPct val="115000"/>
+              </a:lnSpc>
+              <a:spcAft>
+                <a:spcPts val="400"/>
+              </a:spcAft>
+            </a:pPr>
+            <a:r>
+              <a:rPr sz="1150" b="0" i="0">
+                <a:solidFill>
+                  <a:srgbClr val="5B6470"/>
+                </a:solidFill>
+                <a:latin typeface="Segoe UI"/>
+              </a:rPr>
+              <a:t>our validation label is biased</a:t>
+            </a:r>
+          </a:p>
+        </p:txBody>
+      </p:sp>
+      <p:sp>
+        <p:nvSpPr>
+          <p:cNvPr id="13" name="Oval 12"/>
+          <p:cNvSpPr/>
+          <p:nvPr/>
+        </p:nvSpPr>
+        <p:spPr>
+          <a:xfrm>
+            <a:off x="5952744" y="2249424"/>
             <a:ext cx="256032" cy="256032"/>
           </a:xfrm>
           <a:prstGeom prst="ellipse">
@@ -13305,176 +13475,6 @@
       </p:sp>
       <p:sp>
         <p:nvSpPr>
-          <p:cNvPr id="10" name="TextBox 9"/>
-          <p:cNvSpPr txBox="1"/>
-          <p:nvPr/>
-        </p:nvSpPr>
-        <p:spPr>
-          <a:xfrm>
-            <a:off x="2560320" y="1691640"/>
-            <a:ext cx="2286000" cy="365760"/>
-          </a:xfrm>
-          <a:prstGeom prst="rect">
-            <a:avLst/>
-          </a:prstGeom>
-          <a:noFill/>
-        </p:spPr>
-        <p:txBody>
-          <a:bodyPr wrap="square" anchor="t">
-            <a:spAutoFit/>
-          </a:bodyPr>
-          <a:lstStyle/>
-          <a:p>
-            <a:pPr algn="ctr">
-              <a:lnSpc>
-                <a:spcPct val="115000"/>
-              </a:lnSpc>
-              <a:spcAft>
-                <a:spcPts val="400"/>
-              </a:spcAft>
-            </a:pPr>
-            <a:r>
-              <a:rPr sz="1350" b="1" i="0">
-                <a:solidFill>
-                  <a:srgbClr val="1C2128"/>
-                </a:solidFill>
-                <a:latin typeface="Segoe UI"/>
-              </a:rPr>
-              <a:t>Week 2</a:t>
-            </a:r>
-          </a:p>
-        </p:txBody>
-      </p:sp>
-      <p:sp>
-        <p:nvSpPr>
-          <p:cNvPr id="11" name="TextBox 10"/>
-          <p:cNvSpPr txBox="1"/>
-          <p:nvPr/>
-        </p:nvSpPr>
-        <p:spPr>
-          <a:xfrm>
-            <a:off x="2514600" y="2651760"/>
-            <a:ext cx="2377440" cy="274320"/>
-          </a:xfrm>
-          <a:prstGeom prst="rect">
-            <a:avLst/>
-          </a:prstGeom>
-          <a:noFill/>
-        </p:spPr>
-        <p:txBody>
-          <a:bodyPr wrap="square" anchor="t">
-            <a:spAutoFit/>
-          </a:bodyPr>
-          <a:lstStyle/>
-          <a:p>
-            <a:pPr algn="ctr">
-              <a:lnSpc>
-                <a:spcPct val="115000"/>
-              </a:lnSpc>
-              <a:spcAft>
-                <a:spcPts val="400"/>
-              </a:spcAft>
-            </a:pPr>
-            <a:r>
-              <a:rPr sz="1150" b="0" i="0">
-                <a:solidFill>
-                  <a:srgbClr val="5B6470"/>
-                </a:solidFill>
-                <a:latin typeface="Segoe UI"/>
-              </a:rPr>
-              <a:t>First models +</a:t>
-            </a:r>
-          </a:p>
-        </p:txBody>
-      </p:sp>
-      <p:sp>
-        <p:nvSpPr>
-          <p:cNvPr id="12" name="TextBox 11"/>
-          <p:cNvSpPr txBox="1"/>
-          <p:nvPr/>
-        </p:nvSpPr>
-        <p:spPr>
-          <a:xfrm>
-            <a:off x="2514600" y="2898648"/>
-            <a:ext cx="2377440" cy="274320"/>
-          </a:xfrm>
-          <a:prstGeom prst="rect">
-            <a:avLst/>
-          </a:prstGeom>
-          <a:noFill/>
-        </p:spPr>
-        <p:txBody>
-          <a:bodyPr wrap="square" anchor="t">
-            <a:spAutoFit/>
-          </a:bodyPr>
-          <a:lstStyle/>
-          <a:p>
-            <a:pPr algn="ctr">
-              <a:lnSpc>
-                <a:spcPct val="115000"/>
-              </a:lnSpc>
-              <a:spcAft>
-                <a:spcPts val="400"/>
-              </a:spcAft>
-            </a:pPr>
-            <a:r>
-              <a:rPr sz="1150" b="0" i="0">
-                <a:solidFill>
-                  <a:srgbClr val="5B6470"/>
-                </a:solidFill>
-                <a:latin typeface="Segoe UI"/>
-              </a:rPr>
-              <a:t>a fleet risk index</a:t>
-            </a:r>
-          </a:p>
-        </p:txBody>
-      </p:sp>
-      <p:sp>
-        <p:nvSpPr>
-          <p:cNvPr id="13" name="Oval 12"/>
-          <p:cNvSpPr/>
-          <p:nvPr/>
-        </p:nvSpPr>
-        <p:spPr>
-          <a:xfrm>
-            <a:off x="5916168" y="2212848"/>
-            <a:ext cx="329184" cy="329184"/>
-          </a:xfrm>
-          <a:prstGeom prst="ellipse">
-            <a:avLst/>
-          </a:prstGeom>
-          <a:solidFill>
-            <a:srgbClr val="DC2626"/>
-          </a:solidFill>
-          <a:ln>
-            <a:noFill/>
-          </a:ln>
-          <a:effectLst/>
-        </p:spPr>
-        <p:style>
-          <a:lnRef idx="1">
-            <a:schemeClr val="accent1"/>
-          </a:lnRef>
-          <a:fillRef idx="3">
-            <a:schemeClr val="accent1"/>
-          </a:fillRef>
-          <a:effectRef idx="2">
-            <a:schemeClr val="accent1"/>
-          </a:effectRef>
-          <a:fontRef idx="minor">
-            <a:schemeClr val="lt1"/>
-          </a:fontRef>
-        </p:style>
-        <p:txBody>
-          <a:bodyPr rtlCol="0" anchor="ctr"/>
-          <a:lstStyle/>
-          <a:p>
-            <a:pPr algn="ctr"/>
-          </a:p>
-        </p:txBody>
-      </p:sp>
-      <p:sp>
-        <p:nvSpPr>
           <p:cNvPr id="14" name="TextBox 13"/>
           <p:cNvSpPr txBox="1"/>
           <p:nvPr/>
@@ -13506,11 +13506,11 @@
             <a:r>
               <a:rPr sz="1350" b="1" i="0">
                 <a:solidFill>
-                  <a:srgbClr val="DC2626"/>
-                </a:solidFill>
-                <a:latin typeface="Segoe UI"/>
-              </a:rPr>
-              <a:t>Week 3 — discovery</a:t>
+                  <a:srgbClr val="1C2128"/>
+                </a:solidFill>
+                <a:latin typeface="Segoe UI"/>
+              </a:rPr>
+              <a:t>Week 3</a:t>
             </a:r>
           </a:p>
         </p:txBody>
@@ -13552,7 +13552,7 @@
                 </a:solidFill>
                 <a:latin typeface="Segoe UI"/>
               </a:rPr>
-              <a:t>Our validation label is biased.</a:t>
+              <a:t>Attack our own results: simpler</a:t>
             </a:r>
           </a:p>
         </p:txBody>
@@ -13594,7 +13594,7 @@
                 </a:solidFill>
                 <a:latin typeface="Segoe UI"/>
               </a:rPr>
-              <a:t>Everything re-examined.</a:t>
+              <a:t>wins; Thai notes translated</a:t>
             </a:r>
           </a:p>
         </p:txBody>
@@ -13722,7 +13722,7 @@
                 </a:solidFill>
                 <a:latin typeface="Segoe UI"/>
               </a:rPr>
-              <a:t>Attack our own results: simpler</a:t>
+              <a:t>Consolidate: 6-page paper,</a:t>
             </a:r>
           </a:p>
         </p:txBody>
@@ -13764,7 +13764,7 @@
                 </a:solidFill>
                 <a:latin typeface="Segoe UI"/>
               </a:rPr>
-              <a:t>wins; Thai notes translated</a:t>
+              <a:t>dashboard, defense decks</a:t>
             </a:r>
           </a:p>
         </p:txBody>
@@ -13892,7 +13892,7 @@
                 </a:solidFill>
                 <a:latin typeface="Segoe UI"/>
               </a:rPr>
-              <a:t>IEEE paper, dashboard,</a:t>
+              <a:t>Final report, coherence audit,</a:t>
             </a:r>
           </a:p>
         </p:txBody>
